--- a/template/ctr-executive-master.pptx
+++ b/template/ctr-executive-master.pptx
@@ -1812,7 +1812,7 @@
             <c:size val="6"/>
             <c:spPr>
               <a:solidFill>
-                <a:srgbClr val="2E7D32"/>
+                <a:srgbClr val="C62828"/>
               </a:solidFill>
               <a:ln w="9525" cap="flat">
                 <a:solidFill>
@@ -1980,7 +1980,7 @@
             <c:size val="6"/>
             <c:spPr>
               <a:solidFill>
-                <a:srgbClr val="C62828"/>
+                <a:srgbClr val="2E7D32"/>
               </a:solidFill>
               <a:ln w="9525" cap="flat">
                 <a:solidFill>

--- a/template/ctr-executive-master.pptx
+++ b/template/ctr-executive-master.pptx
@@ -1809,20 +1809,6 @@
           </c:dLbls>
           <c:marker>
             <c:symbol val="none"/>
-            <c:size val="6"/>
-            <c:spPr>
-              <a:solidFill>
-                <a:srgbClr val="C62828"/>
-              </a:solidFill>
-              <a:ln w="9525" cap="flat">
-                <a:solidFill>
-                  <a:srgbClr val="C62828"/>
-                </a:solidFill>
-                <a:prstDash val="solid"/>
-                <a:round/>
-              </a:ln>
-              <a:effectLst/>
-            </c:spPr>
           </c:marker>
           <c:cat>
             <c:multiLvlStrRef>
@@ -1977,20 +1963,6 @@
           </c:dLbls>
           <c:marker>
             <c:symbol val="none"/>
-            <c:size val="6"/>
-            <c:spPr>
-              <a:solidFill>
-                <a:srgbClr val="2E7D32"/>
-              </a:solidFill>
-              <a:ln w="9525" cap="flat">
-                <a:solidFill>
-                  <a:srgbClr val="2E7D32"/>
-                </a:solidFill>
-                <a:prstDash val="solid"/>
-                <a:round/>
-              </a:ln>
-              <a:effectLst/>
-            </c:spPr>
           </c:marker>
           <c:cat>
             <c:multiLvlStrRef>
